--- a/dist/초6/영어/말하기와쓰기/초6_영어_말하기와쓰기_02_비교하기.pptx
+++ b/dist/초6/영어/말하기와쓰기/초6_영어_말하기와쓰기_02_비교하기.pptx
@@ -121,13 +121,13 @@
   <p:extLst>
     <p:ext uri="{521415D9-36F7-43E2-AB2F-B90AF26B5E84}">
       <p14:sectionLst xmlns:p14="http://schemas.microsoft.com/office/powerpoint/2010/main">
-        <p14:section name="도입" id="{e49c84b7-b947-d3dc-7255-f48abfa430eb}">
+        <p14:section name="도입" id="{96254bc9-d044-fbc8-f4a3-6395b99bbaec}">
           <p14:sldIdLst>
             <p14:sldId id="256"/>
             <p14:sldId id="257"/>
           </p14:sldIdLst>
         </p14:section>
-        <p14:section name="개념" id="{93010d22-c1fa-856d-fd0a-273db39610a3}">
+        <p14:section name="개념" id="{544b6c83-db9d-71ff-337a-6031ff2fc0d4}">
           <p14:sldIdLst>
             <p14:sldId id="258"/>
             <p14:sldId id="259"/>
@@ -135,7 +135,7 @@
             <p14:sldId id="261"/>
           </p14:sldIdLst>
         </p14:section>
-        <p14:section name="연습" id="{5c5d248f-eead-e382-0719-1b54191e1cd4}">
+        <p14:section name="연습" id="{a3133516-1195-7e8c-3e82-86b533efa187}">
           <p14:sldIdLst>
             <p14:sldId id="262"/>
             <p14:sldId id="263"/>
@@ -143,19 +143,19 @@
             <p14:sldId id="265"/>
           </p14:sldIdLst>
         </p14:section>
-        <p14:section name="확인" id="{d2d62a8c-6c3a-03cc-ffa9-9e719e96282a}">
+        <p14:section name="확인" id="{169c0f75-5bbd-b33d-6435-dff89d756f0f}">
           <p14:sldIdLst>
             <p14:sldId id="266"/>
             <p14:sldId id="267"/>
             <p14:sldId id="268"/>
           </p14:sldIdLst>
         </p14:section>
-        <p14:section name="정리" id="{8840d13e-d093-fa50-98e0-29212e2f93d3}">
+        <p14:section name="정리" id="{9519ef34-54c8-9af1-3f78-f13b5e19f11c}">
           <p14:sldIdLst>
             <p14:sldId id="269"/>
           </p14:sldIdLst>
         </p14:section>
-        <p14:section name="보충" id="{12c645f0-177c-a956-58e1-9d8f574d4ea5}">
+        <p14:section name="보충" id="{24822858-1501-9091-ea4c-141d8b91aab7}">
           <p14:sldIdLst>
             <p14:sldId id="270"/>
           </p14:sldIdLst>

--- a/dist/초6/영어/말하기와쓰기/초6_영어_말하기와쓰기_02_비교하기.pptx
+++ b/dist/초6/영어/말하기와쓰기/초6_영어_말하기와쓰기_02_비교하기.pptx
@@ -121,13 +121,13 @@
   <p:extLst>
     <p:ext uri="{521415D9-36F7-43E2-AB2F-B90AF26B5E84}">
       <p14:sectionLst xmlns:p14="http://schemas.microsoft.com/office/powerpoint/2010/main">
-        <p14:section name="도입" id="{96254bc9-d044-fbc8-f4a3-6395b99bbaec}">
+        <p14:section name="도입" id="{1045b2b8-2d2a-24df-dc91-cbc2e95672ec}">
           <p14:sldIdLst>
             <p14:sldId id="256"/>
             <p14:sldId id="257"/>
           </p14:sldIdLst>
         </p14:section>
-        <p14:section name="개념" id="{544b6c83-db9d-71ff-337a-6031ff2fc0d4}">
+        <p14:section name="개념" id="{6cb7a158-5838-a880-a9da-f56104f66b6d}">
           <p14:sldIdLst>
             <p14:sldId id="258"/>
             <p14:sldId id="259"/>
@@ -135,7 +135,7 @@
             <p14:sldId id="261"/>
           </p14:sldIdLst>
         </p14:section>
-        <p14:section name="연습" id="{a3133516-1195-7e8c-3e82-86b533efa187}">
+        <p14:section name="연습" id="{1e8bf11b-b3bd-1781-e4ef-5b4f2a6c7321}">
           <p14:sldIdLst>
             <p14:sldId id="262"/>
             <p14:sldId id="263"/>
@@ -143,19 +143,19 @@
             <p14:sldId id="265"/>
           </p14:sldIdLst>
         </p14:section>
-        <p14:section name="확인" id="{169c0f75-5bbd-b33d-6435-dff89d756f0f}">
+        <p14:section name="확인" id="{e12aac6c-edf5-de93-3232-b51fe4ec18f3}">
           <p14:sldIdLst>
             <p14:sldId id="266"/>
             <p14:sldId id="267"/>
             <p14:sldId id="268"/>
           </p14:sldIdLst>
         </p14:section>
-        <p14:section name="정리" id="{9519ef34-54c8-9af1-3f78-f13b5e19f11c}">
+        <p14:section name="정리" id="{366d44bb-eaa1-7c30-dd80-5e69f4532b45}">
           <p14:sldIdLst>
             <p14:sldId id="269"/>
           </p14:sldIdLst>
         </p14:section>
-        <p14:section name="보충" id="{24822858-1501-9091-ea4c-141d8b91aab7}">
+        <p14:section name="보충" id="{12b0a4c6-6187-21b0-7464-ac844d5cdf5e}">
           <p14:sldIdLst>
             <p14:sldId id="270"/>
           </p14:sldIdLst>
